--- a/JSW_Energy/JSW_Energy_Pitch_Deck_July2026.pptx
+++ b/JSW_Energy/JSW_Energy_Pitch_Deck_July2026.pptx
@@ -3568,7 +3568,7 @@
                 </a:solidFill>
                 <a:latin typeface="Calibri"/>
               </a:rPr>
-              <a:t>Estimates: attached analyst model, used as given. Market data 17 July 2026. Strictly Confidential — internal circulation only. Not investment advice.</a:t>
+              <a:t>Estimates: attached analyst model, used as given. Primary sources: FY26 annual report, Q4FY26 and Q1FY27 calls. Market data 17 July 2026. Strictly Confidential — internal circulation only. Not investment advice.</a:t>
             </a:r>
           </a:p>
         </p:txBody>
@@ -5643,7 +5643,7 @@
                 </a:solidFill>
                 <a:latin typeface="Calibri"/>
               </a:rPr>
-              <a:t>▪  FY26A's tax charge was NEGATIVE Rs.777cr on positive PBT. At the 25% rate the model uses from FY27E, FY26A PAT would be ~Rs.969cr, not Rs.2,239cr — reported earnings growth of +15% becomes about –50%.</a:t>
+              <a:t>▪  FY26A's tax charge was NEGATIVE Rs.777cr on positive PBT — deferred tax assets recognised at Utkal and KSK once PPAs were signed. Explained and legitimate, but not repeatable: management guides 23–24% from here. Normalised, FY26A PAT is ~Rs.969cr, not Rs.2,239cr — +15% becomes about –50%.</a:t>
             </a:r>
           </a:p>
         </p:txBody>
@@ -7807,7 +7807,7 @@
                 </a:solidFill>
                 <a:latin typeface="Calibri"/>
               </a:rPr>
-              <a:t>▪  Two flags.  </a:t>
+              <a:t>▪  The plan is funded.  </a:t>
             </a:r>
             <a:r>
               <a:rPr sz="1250">
@@ -7816,7 +7816,32 @@
                 </a:solidFill>
                 <a:latin typeface="Calibri"/>
               </a:rPr>
-              <a:t>A dividend maintained through four years of large negative free cash flow; and Rs.8,265cr of idle JSW Steel shares held while borrowing at an implied 8–9%. The model assumes Rs.2,887cr of that is sold in FY27E — we could not verify the disposal has been announced.</a:t>
+              <a:t>Rs.10,150cr raised; Rs.24,184cr of capex is now contractually committed in the audited accounts; reported cost of debt fell 67bp to 8.36%. The CFO says FY27's Rs.20,000cr needs no further equity.</a:t>
+            </a:r>
+          </a:p>
+          <a:p>
+            <a:pPr>
+              <a:spcAft>
+                <a:spcPts val="1100"/>
+              </a:spcAft>
+            </a:pPr>
+            <a:r>
+              <a:rPr sz="1250" b="1">
+                <a:solidFill>
+                  <a:srgbClr val="1F3864"/>
+                </a:solidFill>
+                <a:latin typeface="Calibri"/>
+              </a:rPr>
+              <a:t>▪  Two flags remain.  </a:t>
+            </a:r>
+            <a:r>
+              <a:rPr sz="1250">
+                <a:solidFill>
+                  <a:srgbClr val="0B0B0B"/>
+                </a:solidFill>
+                <a:latin typeface="Calibri"/>
+              </a:rPr>
+              <a:t>A dividend maintained through four years of large negative free cash flow; and Rs.7,862cr of JSW Steel shares still held while borrowing at 8.36% — a cross-holding that runs both ways, since JSW Steel owns 4.86% of JSW Energy.</a:t>
             </a:r>
           </a:p>
         </p:txBody>
@@ -9423,7 +9448,7 @@
                 </a:solidFill>
                 <a:latin typeface="Calibri"/>
               </a:rPr>
-              <a:t>EV/EBITDA values 100% of KSK but the parent owns 74%. Deducting the minority share of FY28E KSK EBITDA at 11.9x removes Rs.43 per share — an adjusted base of ~Rs.582, under 4% upside.</a:t>
+              <a:t>The call option on KSK's 26% has been served, so full consolidation is right — but the ~Rs.1,170cr price is not in FY27E net debt. Adjusting takes the base to ~Rs.619, not the ~Rs.582 it would have been without the buyout.</a:t>
             </a:r>
           </a:p>
           <a:p>
@@ -9448,7 +9473,7 @@
                 </a:solidFill>
                 <a:latin typeface="Calibri"/>
               </a:rPr>
-              <a:t>JSW Steel stake Rs.36/share; Salboni 1,600MW; KSK units 3–6.</a:t>
+              <a:t>Residual JSW Steel stake Rs.34/share; Salboni 3,200MW; KSK units 3–6.</a:t>
             </a:r>
           </a:p>
           <a:p>
@@ -9618,7 +9643,7 @@
                 </a:solidFill>
                 <a:latin typeface="Calibri"/>
               </a:rPr>
-              <a:t>Good disclosure, aligned promoter, unverified tail risks</a:t>
+              <a:t>Clean audit, aligned promoter, one open item</a:t>
             </a:r>
           </a:p>
         </p:txBody>
@@ -9690,7 +9715,7 @@
                 <a:gridCol w="2846572"/>
                 <a:gridCol w="5583661"/>
               </a:tblGrid>
-              <a:tr h="470262">
+              <a:tr h="365760">
                 <a:tc>
                   <a:txBody>
                     <a:bodyPr/>
@@ -9761,7 +9786,7 @@
                   </a:tcPr>
                 </a:tc>
               </a:tr>
-              <a:tr h="470262">
+              <a:tr h="365760">
                 <a:tc>
                   <a:txBody>
                     <a:bodyPr/>
@@ -9832,7 +9857,7 @@
                   </a:tcPr>
                 </a:tc>
               </a:tr>
-              <a:tr h="470262">
+              <a:tr h="365760">
                 <a:tc>
                   <a:txBody>
                     <a:bodyPr/>
@@ -9903,7 +9928,7 @@
                   </a:tcPr>
                 </a:tc>
               </a:tr>
-              <a:tr h="470262">
+              <a:tr h="365760">
                 <a:tc>
                   <a:txBody>
                     <a:bodyPr/>
@@ -9974,7 +9999,7 @@
                   </a:tcPr>
                 </a:tc>
               </a:tr>
-              <a:tr h="470262">
+              <a:tr h="365760">
                 <a:tc>
                   <a:txBody>
                     <a:bodyPr/>
@@ -10045,7 +10070,7 @@
                   </a:tcPr>
                 </a:tc>
               </a:tr>
-              <a:tr h="470262">
+              <a:tr h="365760">
                 <a:tc>
                   <a:txBody>
                     <a:bodyPr/>
@@ -10059,7 +10084,7 @@
                           </a:solidFill>
                           <a:latin typeface="Calibri"/>
                         </a:rPr>
-                        <a:t>Pledge / auditor / board / litigation</a:t>
+                        <a:t>Auditor</a:t>
                       </a:r>
                     </a:p>
                   </a:txBody>
@@ -10082,7 +10107,7 @@
                           </a:solidFill>
                           <a:latin typeface="Calibri"/>
                         </a:rPr>
-                        <a:t>NOT VERIFIED</a:t>
+                        <a:t>Deloitte Haskins &amp; Sells LLP — unmodified</a:t>
                       </a:r>
                     </a:p>
                   </a:txBody>
@@ -10105,7 +10130,7 @@
                           </a:solidFill>
                           <a:latin typeface="Calibri"/>
                         </a:rPr>
-                        <a:t>Could not be confirmed for this note. Read the FY26 AR notes before sizing a position.</a:t>
+                        <a:t>Clean FY26 opinion, no emphasis of matter. One key audit matter: tariff disputes with customers.</a:t>
                       </a:r>
                     </a:p>
                   </a:txBody>
@@ -10116,7 +10141,149 @@
                   </a:tcPr>
                 </a:tc>
               </a:tr>
-              <a:tr h="470268">
+              <a:tr h="365760">
+                <a:tc>
+                  <a:txBody>
+                    <a:bodyPr/>
+                    <a:lstStyle/>
+                    <a:p>
+                      <a:pPr algn="l"/>
+                      <a:r>
+                        <a:rPr sz="1200" b="0">
+                          <a:solidFill>
+                            <a:srgbClr val="0B0B0B"/>
+                          </a:solidFill>
+                          <a:latin typeface="Calibri"/>
+                        </a:rPr>
+                        <a:t>Contingent liabilities</a:t>
+                      </a:r>
+                    </a:p>
+                  </a:txBody>
+                  <a:tcPr anchor="ctr" marT="12700" marB="12700">
+                    <a:solidFill>
+                      <a:srgbClr val="EEF3FA"/>
+                    </a:solidFill>
+                  </a:tcPr>
+                </a:tc>
+                <a:tc>
+                  <a:txBody>
+                    <a:bodyPr/>
+                    <a:lstStyle/>
+                    <a:p>
+                      <a:pPr algn="r"/>
+                      <a:r>
+                        <a:rPr sz="1200" b="0">
+                          <a:solidFill>
+                            <a:srgbClr val="0B0B0B"/>
+                          </a:solidFill>
+                          <a:latin typeface="Calibri"/>
+                        </a:rPr>
+                        <a:t>~Rs.4,506cr, ~15% of net worth</a:t>
+                      </a:r>
+                    </a:p>
+                  </a:txBody>
+                  <a:tcPr anchor="ctr" marT="12700" marB="12700">
+                    <a:solidFill>
+                      <a:srgbClr val="EEF3FA"/>
+                    </a:solidFill>
+                  </a:tcPr>
+                </a:tc>
+                <a:tc>
+                  <a:txBody>
+                    <a:bodyPr/>
+                    <a:lstStyle/>
+                    <a:p>
+                      <a:pPr algn="r"/>
+                      <a:r>
+                        <a:rPr sz="1200" b="0">
+                          <a:solidFill>
+                            <a:srgbClr val="0B0B0B"/>
+                          </a:solidFill>
+                          <a:latin typeface="Calibri"/>
+                        </a:rPr>
+                        <a:t>Claims Rs.2,520cr (down yoy), tariff disputes Rs.340cr, guarantees Rs.605cr, JV share Rs.1,041cr. Not growing.</a:t>
+                      </a:r>
+                    </a:p>
+                  </a:txBody>
+                  <a:tcPr anchor="ctr" marT="12700" marB="12700">
+                    <a:solidFill>
+                      <a:srgbClr val="EEF3FA"/>
+                    </a:solidFill>
+                  </a:tcPr>
+                </a:tc>
+              </a:tr>
+              <a:tr h="365760">
+                <a:tc>
+                  <a:txBody>
+                    <a:bodyPr/>
+                    <a:lstStyle/>
+                    <a:p>
+                      <a:pPr algn="l"/>
+                      <a:r>
+                        <a:rPr sz="1200" b="0">
+                          <a:solidFill>
+                            <a:srgbClr val="0B0B0B"/>
+                          </a:solidFill>
+                          <a:latin typeface="Calibri"/>
+                        </a:rPr>
+                        <a:t>Promoter pledge</a:t>
+                      </a:r>
+                    </a:p>
+                  </a:txBody>
+                  <a:tcPr anchor="ctr" marT="12700" marB="12700">
+                    <a:solidFill>
+                      <a:srgbClr val="FFFFFF"/>
+                    </a:solidFill>
+                  </a:tcPr>
+                </a:tc>
+                <a:tc>
+                  <a:txBody>
+                    <a:bodyPr/>
+                    <a:lstStyle/>
+                    <a:p>
+                      <a:pPr algn="r"/>
+                      <a:r>
+                        <a:rPr sz="1200" b="0">
+                          <a:solidFill>
+                            <a:srgbClr val="0B0B0B"/>
+                          </a:solidFill>
+                          <a:latin typeface="Calibri"/>
+                        </a:rPr>
+                        <a:t>Not disclosed in the AR</a:t>
+                      </a:r>
+                    </a:p>
+                  </a:txBody>
+                  <a:tcPr anchor="ctr" marT="12700" marB="12700">
+                    <a:solidFill>
+                      <a:srgbClr val="FFFFFF"/>
+                    </a:solidFill>
+                  </a:tcPr>
+                </a:tc>
+                <a:tc>
+                  <a:txBody>
+                    <a:bodyPr/>
+                    <a:lstStyle/>
+                    <a:p>
+                      <a:pPr algn="r"/>
+                      <a:r>
+                        <a:rPr sz="1200" b="0">
+                          <a:solidFill>
+                            <a:srgbClr val="0B0B0B"/>
+                          </a:solidFill>
+                          <a:latin typeface="Calibri"/>
+                        </a:rPr>
+                        <a:t>Only project-level lender pledges. Still to be checked in the quarterly shareholding filing — the one open item.</a:t>
+                      </a:r>
+                    </a:p>
+                  </a:txBody>
+                  <a:tcPr anchor="ctr" marT="12700" marB="12700">
+                    <a:solidFill>
+                      <a:srgbClr val="FFFFFF"/>
+                    </a:solidFill>
+                  </a:tcPr>
+                </a:tc>
+              </a:tr>
+              <a:tr h="365760">
                 <a:tc>
                   <a:txBody>
                     <a:bodyPr/>
@@ -10225,7 +10392,7 @@
                 </a:solidFill>
                 <a:latin typeface="Calibri"/>
               </a:rPr>
-              <a:t>▪  Sajjan Jindal (Chairman &amp; MD) — the key-man and capital-allocation authority. Sharad Mahendra (Joint MD &amp; CEO since Feb-2024). Pritesh Vinay (Director Finance &amp; CFO).</a:t>
+              <a:t>▪  Sajjan Jindal (Chairman &amp; MD) — the key-man and capital-allocation authority. Sharad Mahendra (Joint MD &amp; CEO since Feb-2024). Chandrasekaran Prabhakaran (CFO since 1 Jan 2026, replacing Pritesh Vinay) — a CFO change six months before the sector's largest capital raise, which was then delivered.</a:t>
             </a:r>
           </a:p>
           <a:p>
@@ -10487,7 +10654,7 @@
                 </a:solidFill>
                 <a:latin typeface="Calibri"/>
               </a:rPr>
-              <a:t>▪  QIP completion and price — Rs.4,000cr at Rs.525 is already in the share count.</a:t>
+              <a:t>▪  KSK minority buyout price — not yet crystallised, expected end-Q2FY27; ~Rs.1,170cr is absent from the model's net debt.</a:t>
             </a:r>
           </a:p>
           <a:p>
@@ -10503,7 +10670,7 @@
                 </a:solidFill>
                 <a:latin typeface="Calibri"/>
               </a:rPr>
-              <a:t>▪  Promoter warrant conversion — Rs.1,875cr still payable at Rs.525.</a:t>
+              <a:t>▪  First 600MW of KSK units 3-6, mid-FY27 — pure upside, ~Rs.35/share.</a:t>
             </a:r>
           </a:p>
           <a:p>
@@ -10519,7 +10686,7 @@
                 </a:solidFill>
                 <a:latin typeface="Calibri"/>
               </a:rPr>
-              <a:t>▪  Quarterly MW commissioned — 3,155MW needed in FY27E, 873MW came in Q1.</a:t>
+              <a:t>▪  Rajasthan evacuation line, July 2026 — ends the curtailment that cost Rs.50cr in FY26A.</a:t>
             </a:r>
           </a:p>
           <a:p>
@@ -10535,7 +10702,23 @@
                 </a:solidFill>
                 <a:latin typeface="Calibri"/>
               </a:rPr>
-              <a:t>▪  JSW Steel stake sale — Rs.2,887cr is booked in FY27E.</a:t>
+              <a:t>▪  Quarterly MW commissioned — 3,155MW needed in FY27E, 873MW came in Q1.</a:t>
+            </a:r>
+          </a:p>
+          <a:p>
+            <a:pPr>
+              <a:spcAft>
+                <a:spcPts val="700"/>
+              </a:spcAft>
+            </a:pPr>
+            <a:r>
+              <a:rPr sz="1250">
+                <a:solidFill>
+                  <a:srgbClr val="0B0B0B"/>
+                </a:solidFill>
+                <a:latin typeface="Calibri"/>
+              </a:rPr>
+              <a:t>▪  Final DSM regulations — 1.5-2% of RE revenue on management's worst case; substation-level grouping would reduce it.</a:t>
             </a:r>
           </a:p>
         </p:txBody>
@@ -10617,7 +10800,7 @@
                 </a:solidFill>
                 <a:latin typeface="Calibri"/>
               </a:rPr>
-              <a:t>▪  Funding. Rs.53,993cr of negative post-interest FCF; needs Rs.40,532cr of new debt on 1.7–2.2x interest cover.</a:t>
+              <a:t>▪  Funding. De-risked for FY27 (raise complete, cash Rs.12,881cr); unresolved for FY29-30, ~Rs.46,000cr on 2.1x interest cover.</a:t>
             </a:r>
           </a:p>
           <a:p>
@@ -10633,7 +10816,7 @@
                 </a:solidFill>
                 <a:latin typeface="Calibri"/>
               </a:rPr>
-              <a:t>▪  Merchant and curtailment. 700MW at Ind-Barath has no PPA; supply is growing faster than demand.</a:t>
+              <a:t>▪  Evacuation, not merchant price. Only 9,500 of a planned 15,000 ckm built; eases ~2029. Open capacity is just ~5% of the base.</a:t>
             </a:r>
           </a:p>
           <a:p>
@@ -10649,7 +10832,7 @@
                 </a:solidFill>
                 <a:latin typeface="Calibri"/>
               </a:rPr>
-              <a:t>▪  Earnings quality. FY26A's tax credit, and minority interest modelled to fall from Rs.523cr to Rs.24cr — worth 18% of FY28E EPS.</a:t>
+              <a:t>▪  Three items the model omits: the non-repeatable FY26A tax credit, the cost of the KSK minority buyout, and the Supreme Court's 18% Himachal free-power ruling (~287 MU/yr, permanent).</a:t>
             </a:r>
           </a:p>
           <a:p>
@@ -10665,7 +10848,7 @@
                 </a:solidFill>
                 <a:latin typeface="Calibri"/>
               </a:rPr>
-              <a:t>▪  Analytical risk. Contingent liabilities, litigation, auditor opinion, pledge and RPT quantum are all unverified.</a:t>
+              <a:t>▪  Per-MW economics. The model implies Rs.1.02cr/MW of incremental RE EBITDA against management's own Rs.0.75cr/MW steady state — a Rs.3,325cr gap to FY30E.</a:t>
             </a:r>
           </a:p>
         </p:txBody>
@@ -10727,7 +10910,7 @@
                 </a:solidFill>
                 <a:latin typeface="Calibri"/>
               </a:rPr>
-              <a:t>sell if FY27 EBITDA lands below Rs.11,500cr AND net debt/EBITDA is above 6.5x at FY27-end — the build has neither delivered nor been funded. Upgrade to buy if FY27 EBITDA exceeds Rs.13,000cr, leverage closes below 5.5x and the QIP prices at or above Rs.525.</a:t>
+              <a:t>sell if FY27 EBITDA lands below Rs.11,500cr AND net debt/EBITDA is above 6.5x at FY27-end — the build has neither delivered nor been funded. Upgrade to buy if FY27 EBITDA exceeds Rs.13,000cr and leverage closes below 5.5x on the model's all-in measure.</a:t>
             </a:r>
           </a:p>
         </p:txBody>
@@ -11204,8 +11387,8 @@
         </p:nvSpPr>
         <p:spPr>
           <a:xfrm>
-            <a:off x="566928" y="3246120"/>
-            <a:ext cx="11057839" cy="2971800"/>
+            <a:off x="566928" y="3154680"/>
+            <a:ext cx="11057839" cy="3063239"/>
           </a:xfrm>
           <a:prstGeom prst="rect">
             <a:avLst/>
@@ -11220,11 +11403,11 @@
           <a:p>
             <a:pPr>
               <a:spcAft>
-                <a:spcPts val="1000"/>
+                <a:spcPts val="800"/>
               </a:spcAft>
             </a:pPr>
             <a:r>
-              <a:rPr sz="1350" b="1">
+              <a:rPr sz="1260" b="1">
                 <a:solidFill>
                   <a:srgbClr val="1F3864"/>
                 </a:solidFill>
@@ -11233,7 +11416,7 @@
               <a:t>▪  The business is genuinely better than it was.  </a:t>
             </a:r>
             <a:r>
-              <a:rPr sz="1350">
+              <a:rPr sz="1260">
                 <a:solidFill>
                   <a:srgbClr val="0B0B0B"/>
                 </a:solidFill>
@@ -11245,11 +11428,11 @@
           <a:p>
             <a:pPr>
               <a:spcAft>
-                <a:spcPts val="1000"/>
+                <a:spcPts val="800"/>
               </a:spcAft>
             </a:pPr>
             <a:r>
-              <a:rPr sz="1350" b="1">
+              <a:rPr sz="1260" b="1">
                 <a:solidFill>
                   <a:srgbClr val="1F3864"/>
                 </a:solidFill>
@@ -11258,23 +11441,23 @@
               <a:t>▪  The base target requires nothing heroic.  </a:t>
             </a:r>
             <a:r>
-              <a:rPr sz="1350">
+              <a:rPr sz="1260">
                 <a:solidFill>
                   <a:srgbClr val="0B0B0B"/>
                 </a:solidFill>
                 <a:latin typeface="Calibri"/>
               </a:rPr>
-              <a:t>Only that FY28E EBITDA of Rs.15,942cr is delivered and the market keeps paying roughly what it pays today. No re-rating, no acquisition, and no credit for Salboni, KSK units 3–6 or the Rs.36/share JSW Steel stake.</a:t>
+              <a:t>Only that FY28E EBITDA of Rs.15,942cr is delivered and the market keeps paying roughly what it pays today. No re-rating, no acquisition, and no credit for Salboni, KSK units 3–6 or the Rs.34/share residual JSW Steel stake.</a:t>
             </a:r>
           </a:p>
           <a:p>
             <a:pPr>
               <a:spcAft>
-                <a:spcPts val="1000"/>
+                <a:spcPts val="800"/>
               </a:spcAft>
             </a:pPr>
             <a:r>
-              <a:rPr sz="1350" b="1">
+              <a:rPr sz="1260" b="1">
                 <a:solidFill>
                   <a:srgbClr val="1F3864"/>
                 </a:solidFill>
@@ -11283,7 +11466,7 @@
               <a:t>▪  But the risk-reward is not asymmetric.  </a:t>
             </a:r>
             <a:r>
-              <a:rPr sz="1350">
+              <a:rPr sz="1260">
                 <a:solidFill>
                   <a:srgbClr val="0B0B0B"/>
                 </a:solidFill>
@@ -11295,11 +11478,11 @@
           <a:p>
             <a:pPr>
               <a:spcAft>
-                <a:spcPts val="1000"/>
+                <a:spcPts val="800"/>
               </a:spcAft>
             </a:pPr>
             <a:r>
-              <a:rPr sz="1350" b="1">
+              <a:rPr sz="1260" b="1">
                 <a:solidFill>
                   <a:srgbClr val="1F3864"/>
                 </a:solidFill>
@@ -11308,13 +11491,13 @@
               <a:t>▪  What caps position sizing.  </a:t>
             </a:r>
             <a:r>
-              <a:rPr sz="1350">
+              <a:rPr sz="1260">
                 <a:solidFill>
                   <a:srgbClr val="0B0B0B"/>
                 </a:solidFill>
                 <a:latin typeface="Calibri"/>
               </a:rPr>
-              <a:t>Unverified contingent liabilities, litigation, auditor commentary, pledge and RPT quantum, inside a promoter-controlled structure where 26% of the best asset already belongs to someone else. Buy on evidence — FY27 EBITDA above Rs.13,000cr with leverage under 5.5x — or nearer Rs.480.</a:t>
+              <a:t>Less than we thought before reading the primary sources — the audit is clean and contingent exposure is ~15% of net worth and not growing. What remains: ~Rs.46,000cr of FY29-30 capex on 2.1x interest cover, the Himachal free-power ruling absent from the forecast, per-MW economics 36% above management's own benchmark, and an unseen promoter pledge position. Buy on evidence — FY27 EBITDA above Rs.13,000cr with leverage under 5.5x — or nearer Rs.480.</a:t>
             </a:r>
           </a:p>
         </p:txBody>
@@ -11526,7 +11709,7 @@
                 </a:solidFill>
                 <a:latin typeface="Calibri"/>
               </a:rPr>
-              <a:t>5,658MW thermal, 1,631MW hydro and 6,165MW renewables — 13,454MW operational at FY26A, 14,535MW at 30 June 2026, 61% renewable.</a:t>
+              <a:t>5,658MW thermal, 1,631MW hydro and 6,165MW renewables — 13.45GW at FY26A and 14.6GW after Q1FY27, 61% renewable. A further 14GW is under construction, all tied under long-term PPAs; locked-in capacity is 32.1GW against a 30GW-by-2030 target.</a:t>
             </a:r>
           </a:p>
           <a:p>
@@ -11601,7 +11784,32 @@
                 </a:solidFill>
                 <a:latin typeface="Calibri"/>
               </a:rPr>
-              <a:t>Net debt rose Rs.25,155cr in FY26A alone, to Rs.70,081cr. Leverage 7.0x EBITDA; interest cover 1.70x.</a:t>
+              <a:t>Net debt rose Rs.25,155cr in FY26A alone, to Rs.70,081cr. Leverage 7.0x on the model's measure, 5.2x on the company's (ex-CWIP debt); interest cover 1.70x.</a:t>
+            </a:r>
+          </a:p>
+          <a:p>
+            <a:pPr>
+              <a:spcAft>
+                <a:spcPts val="1300"/>
+              </a:spcAft>
+            </a:pPr>
+            <a:r>
+              <a:rPr sz="1550" b="1">
+                <a:solidFill>
+                  <a:srgbClr val="1F3864"/>
+                </a:solidFill>
+                <a:latin typeface="Calibri"/>
+              </a:rPr>
+              <a:t>▪  The funding is done.  </a:t>
+            </a:r>
+            <a:r>
+              <a:rPr sz="1550">
+                <a:solidFill>
+                  <a:srgbClr val="0B0B0B"/>
+                </a:solidFill>
+                <a:latin typeface="Calibri"/>
+              </a:rPr>
+              <a:t>Rs.10,150cr raised across FY26 and Q1FY27 — Rs.3,000cr promoter preferential, Rs.3,150cr from the JSW Steel stake, Rs.4,000cr QIP. Leverage improved to 4.95x, inside the 5.0–5.5x guardrail. Cash Rs.12,881cr.</a:t>
             </a:r>
           </a:p>
           <a:p>
@@ -11885,7 +12093,7 @@
                 </a:solidFill>
                 <a:latin typeface="Calibri"/>
               </a:rPr>
-              <a:t>▪  KSK Mahanadi — the largest single EBITDA contributor in FY26A at Rs.3,343cr — is only 74% owned.</a:t>
+              <a:t>▪  KSK Mahanadi — the largest single EBITDA contributor in FY26A at Rs.3,343cr — is 74% owned, and the call option on the balance 26% has been served.</a:t>
             </a:r>
           </a:p>
           <a:p>
@@ -11951,7 +12159,7 @@
                 </a:solidFill>
                 <a:latin typeface="Calibri"/>
               </a:rPr>
-              <a:t>Source: FY25 annual report (AOC-1), Q4FY26 and Q1FY27 filings, analyst model.</a:t>
+              <a:t>Source: FY26 Integrated Annual Report (AOC-1), Q4FY26 and Q1FY27 calls, analyst model.</a:t>
             </a:r>
           </a:p>
         </p:txBody>
